--- a/deck/DriftSense_Submission.pptx
+++ b/deck/DriftSense_Submission.pptx
@@ -8388,7 +8388,7 @@
                 <a:ea typeface="Cambria" pitchFamily="34" charset="-122"/>
                 <a:cs typeface="Cambria" pitchFamily="34" charset="-120"/>
               </a:rPr>
-              <a:t>49.0%</a:t>
+              <a:t>50.0%</a:t>
             </a:r>
             <a:endParaRPr lang="en-US" sz="3800" dirty="0"/>
           </a:p>
@@ -8510,7 +8510,7 @@
                 <a:ea typeface="Cambria" pitchFamily="34" charset="-122"/>
                 <a:cs typeface="Cambria" pitchFamily="34" charset="-120"/>
               </a:rPr>
-              <a:t>61.2%</a:t>
+              <a:t>62.5%</a:t>
             </a:r>
             <a:endParaRPr lang="en-US" sz="3800" dirty="0"/>
           </a:p>

--- a/deck/DriftSense_Submission.pptx
+++ b/deck/DriftSense_Submission.pptx
@@ -6128,7 +6128,7 @@
                 <a:ea typeface="Poppins" pitchFamily="34" charset="-122"/>
                 <a:cs typeface="Poppins" pitchFamily="34" charset="-120"/>
               </a:rPr>
-              <a:t>Enter Team Name Here...</a:t>
+              <a:t>Silicon Bakers</a:t>
             </a:r>
             <a:endParaRPr lang="en-US" sz="1000" dirty="0"/>
           </a:p>
@@ -6143,7 +6143,7 @@
         <p:spPr>
           <a:xfrm>
             <a:off x="4080053" y="2270455"/>
-            <a:ext cx="1089965" cy="200254"/>
+            <a:ext cx="4023360" cy="200254"/>
           </a:xfrm>
           <a:prstGeom prst="rect">
             <a:avLst/>
@@ -6169,7 +6169,7 @@
                 <a:ea typeface="Poppins" pitchFamily="34" charset="-122"/>
                 <a:cs typeface="Poppins" pitchFamily="34" charset="-120"/>
               </a:rPr>
-              <a:t>{Enter Name}</a:t>
+              <a:t>Yogeshwar S</a:t>
             </a:r>
             <a:endParaRPr lang="en-US" sz="1100" dirty="0"/>
           </a:p>
@@ -6210,7 +6210,7 @@
                 <a:ea typeface="Poppins" pitchFamily="34" charset="-122"/>
                 <a:cs typeface="Poppins" pitchFamily="34" charset="-120"/>
               </a:rPr>
-              <a:t>{Enter Year}</a:t>
+              <a:t>3rd Year</a:t>
             </a:r>
             <a:endParaRPr lang="en-US" sz="1100" dirty="0"/>
           </a:p>
@@ -6225,7 +6225,7 @@
         <p:spPr>
           <a:xfrm>
             <a:off x="4080053" y="2725826"/>
-            <a:ext cx="1089965" cy="200254"/>
+            <a:ext cx="4023360" cy="200254"/>
           </a:xfrm>
           <a:prstGeom prst="rect">
             <a:avLst/>
@@ -6251,7 +6251,7 @@
                 <a:ea typeface="Poppins" pitchFamily="34" charset="-122"/>
                 <a:cs typeface="Poppins" pitchFamily="34" charset="-120"/>
               </a:rPr>
-              <a:t>{Enter Name}</a:t>
+              <a:t>Ankam Charam Teja</a:t>
             </a:r>
             <a:endParaRPr lang="en-US" sz="1100" dirty="0"/>
           </a:p>
@@ -6292,7 +6292,7 @@
                 <a:ea typeface="Poppins" pitchFamily="34" charset="-122"/>
                 <a:cs typeface="Poppins" pitchFamily="34" charset="-120"/>
               </a:rPr>
-              <a:t>{Enter Year}</a:t>
+              <a:t>3rd Year</a:t>
             </a:r>
             <a:endParaRPr lang="en-US" sz="1100" dirty="0"/>
           </a:p>
@@ -6307,7 +6307,7 @@
         <p:spPr>
           <a:xfrm>
             <a:off x="4080053" y="3181198"/>
-            <a:ext cx="1089965" cy="200254"/>
+            <a:ext cx="4023360" cy="200254"/>
           </a:xfrm>
           <a:prstGeom prst="rect">
             <a:avLst/>
@@ -6333,7 +6333,7 @@
                 <a:ea typeface="Poppins" pitchFamily="34" charset="-122"/>
                 <a:cs typeface="Poppins" pitchFamily="34" charset="-120"/>
               </a:rPr>
-              <a:t>{Enter Name}</a:t>
+              <a:t>—</a:t>
             </a:r>
             <a:endParaRPr lang="en-US" sz="1100" dirty="0"/>
           </a:p>
@@ -6374,7 +6374,7 @@
                 <a:ea typeface="Poppins" pitchFamily="34" charset="-122"/>
                 <a:cs typeface="Poppins" pitchFamily="34" charset="-120"/>
               </a:rPr>
-              <a:t>{Enter Year}</a:t>
+              <a:t>—</a:t>
             </a:r>
             <a:endParaRPr lang="en-US" sz="1100" dirty="0"/>
           </a:p>
@@ -6389,7 +6389,7 @@
         <p:spPr>
           <a:xfrm>
             <a:off x="4080053" y="3636569"/>
-            <a:ext cx="1089965" cy="200254"/>
+            <a:ext cx="4023360" cy="200254"/>
           </a:xfrm>
           <a:prstGeom prst="rect">
             <a:avLst/>
@@ -6415,7 +6415,7 @@
                 <a:ea typeface="Poppins" pitchFamily="34" charset="-122"/>
                 <a:cs typeface="Poppins" pitchFamily="34" charset="-120"/>
               </a:rPr>
-              <a:t>{Enter Name}</a:t>
+              <a:t>—</a:t>
             </a:r>
             <a:endParaRPr lang="en-US" sz="1100" dirty="0"/>
           </a:p>
@@ -6456,7 +6456,7 @@
                 <a:ea typeface="Poppins" pitchFamily="34" charset="-122"/>
                 <a:cs typeface="Poppins" pitchFamily="34" charset="-120"/>
               </a:rPr>
-              <a:t>{Enter Year}</a:t>
+              <a:t>—</a:t>
             </a:r>
             <a:endParaRPr lang="en-US" sz="1100" dirty="0"/>
           </a:p>
@@ -6497,7 +6497,7 @@
                 <a:ea typeface="Poppins" pitchFamily="34" charset="-122"/>
                 <a:cs typeface="Poppins" pitchFamily="34" charset="-120"/>
               </a:rPr>
-              <a:t>{Enter Full College Name}</a:t>
+              <a:t>Amrita Vishwa Vidyapeetham</a:t>
             </a:r>
             <a:endParaRPr lang="en-US" sz="1200" dirty="0"/>
           </a:p>
@@ -6538,7 +6538,7 @@
                 <a:ea typeface="Poppins" pitchFamily="34" charset="-122"/>
                 <a:cs typeface="Poppins" pitchFamily="34" charset="-120"/>
               </a:rPr>
-              <a:t>{+91 XXXXX XXXXX}</a:t>
+              <a:t>+91 94878 40396</a:t>
             </a:r>
             <a:endParaRPr lang="en-US" sz="1200" dirty="0"/>
           </a:p>
@@ -6579,7 +6579,7 @@
                 <a:ea typeface="Poppins" pitchFamily="34" charset="-122"/>
                 <a:cs typeface="Poppins" pitchFamily="34" charset="-120"/>
               </a:rPr>
-              <a:t>{email@example.com}</a:t>
+              <a:t>yogeshwarsetg@gmail.com</a:t>
             </a:r>
             <a:endParaRPr lang="en-US" sz="1200" dirty="0"/>
           </a:p>
